--- a/어딨어_내_화장실_발표자료_최종_수정.pptx
+++ b/어딨어_내_화장실_발표자료_최종_수정.pptx
@@ -1510,7 +1510,7 @@
                 <a:ea typeface="맑은 고딕" pitchFamily="34" charset="-122"/>
                 <a:cs typeface="맑은 고딕" pitchFamily="34" charset="-120"/>
               </a:rPr>
-              <a:t xml:space="preserve">PROJECT BRIEFING · 코드 &amp; </a:t>
+              <a:t>PROJECT BRIEFING · 코드 &amp; </a:t>
             </a:r>
             <a:r>
               <a:rPr lang="en-US" sz="1400" b="1" kern="0" spc="200" dirty="0" err="1">
@@ -1532,7 +1532,7 @@
                 <a:ea typeface="맑은 고딕" pitchFamily="34" charset="-122"/>
                 <a:cs typeface="맑은 고딕" pitchFamily="34" charset="-120"/>
               </a:rPr>
-              <a:t xml:space="preserve"> </a:t>
+              <a:t> </a:t>
             </a:r>
             <a:r>
               <a:rPr lang="en-US" sz="1400" b="1" kern="0" spc="200" dirty="0" err="1">
@@ -1624,7 +1624,7 @@
                 <a:ea typeface="맑은 고딕" pitchFamily="34" charset="-122"/>
                 <a:cs typeface="맑은 고딕" pitchFamily="34" charset="-120"/>
               </a:rPr>
-              <a:t xml:space="preserve">GPS 기반 공중화장실 </a:t>
+              <a:t>GPS 기반 공중화장실 </a:t>
             </a:r>
             <a:r>
               <a:rPr lang="en-US" sz="1700" dirty="0" err="1">
@@ -1646,7 +1646,7 @@
                 <a:ea typeface="맑은 고딕" pitchFamily="34" charset="-122"/>
                 <a:cs typeface="맑은 고딕" pitchFamily="34" charset="-120"/>
               </a:rPr>
-              <a:t xml:space="preserve"> </a:t>
+              <a:t> </a:t>
             </a:r>
             <a:r>
               <a:rPr lang="en-US" sz="1700" dirty="0" err="1">
@@ -1668,7 +1668,7 @@
                 <a:ea typeface="맑은 고딕" pitchFamily="34" charset="-122"/>
                 <a:cs typeface="맑은 고딕" pitchFamily="34" charset="-120"/>
               </a:rPr>
-              <a:t xml:space="preserve"> </a:t>
+              <a:t> </a:t>
             </a:r>
             <a:r>
               <a:rPr lang="en-US" sz="1700" dirty="0" err="1">
@@ -1690,7 +1690,7 @@
                 <a:ea typeface="맑은 고딕" pitchFamily="34" charset="-122"/>
                 <a:cs typeface="맑은 고딕" pitchFamily="34" charset="-120"/>
               </a:rPr>
-              <a:t xml:space="preserve"> </a:t>
+              <a:t> </a:t>
             </a:r>
           </a:p>
           <a:p>
@@ -1709,7 +1709,7 @@
                 <a:ea typeface="맑은 고딕" pitchFamily="34" charset="-122"/>
                 <a:cs typeface="맑은 고딕" pitchFamily="34" charset="-120"/>
               </a:rPr>
-              <a:t xml:space="preserve">— 단일 HTML </a:t>
+              <a:t>— 단일 HTML </a:t>
             </a:r>
             <a:r>
               <a:rPr lang="en-US" sz="1700" dirty="0" err="1">
@@ -1731,7 +1731,7 @@
                 <a:ea typeface="맑은 고딕" pitchFamily="34" charset="-122"/>
                 <a:cs typeface="맑은 고딕" pitchFamily="34" charset="-120"/>
               </a:rPr>
-              <a:t xml:space="preserve"> </a:t>
+              <a:t> </a:t>
             </a:r>
             <a:r>
               <a:rPr lang="en-US" sz="1700" dirty="0" err="1">
@@ -1746,7 +1746,7 @@
             </a:r>
             <a:r>
               <a:rPr lang="ko-KR" altLang="en-US" sz="1700" dirty="0"/>
-              <a:t xml:space="preserve"> </a:t>
+              <a:t> </a:t>
             </a:r>
             <a:r>
               <a:rPr lang="en-US" sz="1700" dirty="0" err="1">
@@ -1768,7 +1768,7 @@
                 <a:ea typeface="맑은 고딕" pitchFamily="34" charset="-122"/>
                 <a:cs typeface="맑은 고딕" pitchFamily="34" charset="-120"/>
               </a:rPr>
-              <a:t xml:space="preserve"> 시스템의 코드 구조와 작동 원리</a:t>
+              <a:t> 시스템의 코드 구조와 작동 원리</a:t>
             </a:r>
             <a:endParaRPr lang="en-US" sz="1700" dirty="0"/>
           </a:p>
@@ -2029,7 +2029,7 @@
                 <a:latin typeface="맑은 고딕" pitchFamily="34" charset="0"/>
                 <a:ea typeface="맑은 고딕" pitchFamily="34" charset="-122"/>
               </a:rPr>
-              <a:t xml:space="preserve">, </a:t>
+              <a:t>, </a:t>
             </a:r>
             <a:r>
               <a:rPr lang="ko-KR" altLang="en-US" sz="1300" i="1" dirty="0">
@@ -2049,7 +2049,7 @@
                 <a:latin typeface="맑은 고딕" pitchFamily="34" charset="0"/>
                 <a:ea typeface="맑은 고딕" pitchFamily="34" charset="-122"/>
               </a:rPr>
-              <a:t xml:space="preserve">, </a:t>
+              <a:t>, </a:t>
             </a:r>
             <a:r>
               <a:rPr lang="ko-KR" altLang="en-US" sz="1300" i="1">
@@ -2886,7 +2886,7 @@
                 <a:ea typeface="맑은 고딕" pitchFamily="34" charset="-122"/>
                 <a:cs typeface="맑은 고딕" pitchFamily="34" charset="-120"/>
               </a:rPr>
-              <a:t xml:space="preserve">🔗  사이트 바로 가기 :  </a:t>
+              <a:t>🔗  사이트 바로 가기 :  </a:t>
             </a:r>
             <a:r>
               <a:rPr lang="en-US" sz="1400" b="1" u="sng" dirty="0">
@@ -5358,7 +5358,7 @@
                 <a:ea typeface="맑은 고딕" pitchFamily="34" charset="-122"/>
                 <a:cs typeface="맑은 고딕" pitchFamily="34" charset="-120"/>
               </a:rPr>
-              <a:t xml:space="preserve">화장실 하나하나는 좌표·평점·시설 정보를 담은 객체이며, 전체가 하나의 </a:t>
+              <a:t>화장실 하나하나는 좌표·평점·시설 정보를 담은 객체이며, 전체가 하나의 </a:t>
             </a:r>
             <a:r>
               <a:rPr lang="en-US" sz="1500" dirty="0" err="1">
@@ -5380,7 +5380,7 @@
                 <a:ea typeface="맑은 고딕" pitchFamily="34" charset="-122"/>
                 <a:cs typeface="맑은 고딕" pitchFamily="34" charset="-120"/>
               </a:rPr>
-              <a:t xml:space="preserve"> </a:t>
+              <a:t> </a:t>
             </a:r>
             <a:r>
               <a:rPr lang="en-US" sz="1500" dirty="0" err="1">
@@ -5534,7 +5534,7 @@
                 <a:ea typeface="Consolas" pitchFamily="34" charset="-122"/>
                 <a:cs typeface="Consolas" pitchFamily="34" charset="-120"/>
               </a:rPr>
-              <a:t xml:space="preserve">  { id: 1, name: "강남역 2번 출구 공중화장실",</a:t>
+              <a:t>  { id: 1, name: "강남역 2번 출구 공중화장실",</a:t>
             </a:r>
             <a:endParaRPr lang="en-US" sz="1400" dirty="0"/>
           </a:p>
@@ -5554,7 +5554,7 @@
                 <a:ea typeface="Consolas" pitchFamily="34" charset="-122"/>
                 <a:cs typeface="Consolas" pitchFamily="34" charset="-120"/>
               </a:rPr>
-              <a:t xml:space="preserve">    </a:t>
+              <a:t>    </a:t>
             </a:r>
             <a:r>
               <a:rPr lang="en-US" sz="1400" dirty="0">
@@ -5576,7 +5576,7 @@
                 <a:ea typeface="Consolas" pitchFamily="34" charset="-122"/>
                 <a:cs typeface="Consolas" pitchFamily="34" charset="-120"/>
               </a:rPr>
-              <a:t xml:space="preserve">: 37.4984, </a:t>
+              <a:t>: 37.4984, </a:t>
             </a:r>
             <a:r>
               <a:rPr lang="en-US" sz="1400" dirty="0">
@@ -5618,7 +5618,7 @@
                 <a:ea typeface="Consolas" pitchFamily="34" charset="-122"/>
                 <a:cs typeface="Consolas" pitchFamily="34" charset="-120"/>
               </a:rPr>
-              <a:t xml:space="preserve">   </a:t>
+              <a:t>   </a:t>
             </a:r>
             <a:r>
               <a:rPr lang="en-US" sz="1400" dirty="0">
@@ -5629,7 +5629,7 @@
                 <a:ea typeface="Consolas" pitchFamily="34" charset="-122"/>
                 <a:cs typeface="Consolas" pitchFamily="34" charset="-120"/>
               </a:rPr>
-              <a:t xml:space="preserve"> type</a:t>
+              <a:t> type</a:t>
             </a:r>
             <a:r>
               <a:rPr lang="en-US" sz="1400" dirty="0">
@@ -5640,7 +5640,7 @@
                 <a:ea typeface="Consolas" pitchFamily="34" charset="-122"/>
                 <a:cs typeface="Consolas" pitchFamily="34" charset="-120"/>
               </a:rPr>
-              <a:t xml:space="preserve">: "public",  </a:t>
+              <a:t>: "public",  </a:t>
             </a:r>
             <a:r>
               <a:rPr lang="en-US" sz="1400" dirty="0">
@@ -5662,7 +5662,7 @@
                 <a:ea typeface="Consolas" pitchFamily="34" charset="-122"/>
                 <a:cs typeface="Consolas" pitchFamily="34" charset="-120"/>
               </a:rPr>
-              <a:t xml:space="preserve">: 4.2, </a:t>
+              <a:t>: 4.2, </a:t>
             </a:r>
             <a:r>
               <a:rPr lang="en-US" sz="1400" dirty="0">
@@ -5696,15 +5696,15 @@
               <a:buNone/>
             </a:pPr>
             <a:r>
-              <a:rPr lang="en-US" sz="1400" dirty="0">
-                <a:solidFill>
-                  <a:srgbClr val="CFE3FF"/>
+              <a:rPr lang="ko-KR" altLang="en-US" sz="1400" dirty="0">
+                <a:solidFill>
+                  <a:srgbClr val="FFFF00"/>
                 </a:solidFill>
                 <a:latin typeface="Consolas" pitchFamily="34" charset="0"/>
                 <a:ea typeface="Consolas" pitchFamily="34" charset="-122"/>
                 <a:cs typeface="Consolas" pitchFamily="34" charset="-120"/>
               </a:rPr>
-              <a:t xml:space="preserve">    </a:t>
+              <a:t>    </a:t>
             </a:r>
             <a:r>
               <a:rPr lang="en-US" sz="1400" dirty="0">
@@ -5715,7 +5715,7 @@
                 <a:ea typeface="Consolas" pitchFamily="34" charset="-122"/>
                 <a:cs typeface="Consolas" pitchFamily="34" charset="-120"/>
               </a:rPr>
-              <a:t>bidet</a:t>
+              <a:t>open24h</a:t>
             </a:r>
             <a:r>
               <a:rPr lang="en-US" sz="1400" dirty="0">
@@ -5726,7 +5726,7 @@
                 <a:ea typeface="Consolas" pitchFamily="34" charset="-122"/>
                 <a:cs typeface="Consolas" pitchFamily="34" charset="-120"/>
               </a:rPr>
-              <a:t xml:space="preserve">: true, </a:t>
+              <a:t>: true, </a:t>
             </a:r>
             <a:r>
               <a:rPr lang="en-US" sz="1400" dirty="0">
@@ -5737,7 +5737,7 @@
                 <a:ea typeface="Consolas" pitchFamily="34" charset="-122"/>
                 <a:cs typeface="Consolas" pitchFamily="34" charset="-120"/>
               </a:rPr>
-              <a:t>open24h</a:t>
+              <a:t>disabled</a:t>
             </a:r>
             <a:r>
               <a:rPr lang="en-US" sz="1400" dirty="0">
@@ -5748,29 +5748,93 @@
                 <a:ea typeface="Consolas" pitchFamily="34" charset="-122"/>
                 <a:cs typeface="Consolas" pitchFamily="34" charset="-120"/>
               </a:rPr>
-              <a:t xml:space="preserve">: true, </a:t>
-            </a:r>
+              <a:t>: true,</a:t>
+            </a:r>
+            <a:endParaRPr lang="en-US" sz="1400" dirty="0"/>
+          </a:p>
+          <a:p>
+            <a:pPr marL="0" indent="0">
+              <a:lnSpc>
+                <a:spcPct val="118000"/>
+              </a:lnSpc>
+              <a:buNone/>
+            </a:pPr>
             <a:r>
               <a:rPr lang="en-US" sz="1400" dirty="0">
                 <a:solidFill>
-                  <a:srgbClr val="FFFF00"/>
+                  <a:srgbClr val="CFE3FF"/>
                 </a:solidFill>
                 <a:latin typeface="Consolas" pitchFamily="34" charset="0"/>
                 <a:ea typeface="Consolas" pitchFamily="34" charset="-122"/>
                 <a:cs typeface="Consolas" pitchFamily="34" charset="-120"/>
               </a:rPr>
-              <a:t>disabled</a:t>
+              <a:t>    </a:t>
             </a:r>
             <a:r>
               <a:rPr lang="en-US" sz="1400" dirty="0">
                 <a:solidFill>
-                  <a:srgbClr val="CFE3FF"/>
+                  <a:srgbClr val="FFFF00"/>
                 </a:solidFill>
                 <a:latin typeface="Consolas" pitchFamily="34" charset="0"/>
                 <a:ea typeface="Consolas" pitchFamily="34" charset="-122"/>
                 <a:cs typeface="Consolas" pitchFamily="34" charset="-120"/>
               </a:rPr>
-              <a:t>: true,</a:t>
+              <a:t>clean</a:t>
+            </a:r>
+            <a:r>
+              <a:rPr lang="en-US" sz="1400" dirty="0">
+                <a:solidFill>
+                  <a:srgbClr val="CFE3FF"/>
+                </a:solidFill>
+                <a:latin typeface="Consolas" pitchFamily="34" charset="0"/>
+                <a:ea typeface="Consolas" pitchFamily="34" charset="-122"/>
+                <a:cs typeface="Consolas" pitchFamily="34" charset="-120"/>
+              </a:rPr>
+              <a:t>: 85, </a:t>
+            </a:r>
+            <a:r>
+              <a:rPr lang="en-US" sz="1400" dirty="0">
+                <a:solidFill>
+                  <a:srgbClr val="FFFF00"/>
+                </a:solidFill>
+                <a:latin typeface="Consolas" pitchFamily="34" charset="0"/>
+                <a:ea typeface="Consolas" pitchFamily="34" charset="-122"/>
+                <a:cs typeface="Consolas" pitchFamily="34" charset="-120"/>
+              </a:rPr>
+              <a:t>stalls</a:t>
+            </a:r>
+            <a:r>
+              <a:rPr lang="en-US" sz="1400" dirty="0">
+                <a:solidFill>
+                  <a:srgbClr val="CFE3FF"/>
+                </a:solidFill>
+                <a:latin typeface="Consolas" pitchFamily="34" charset="0"/>
+                <a:ea typeface="Consolas" pitchFamily="34" charset="-122"/>
+                <a:cs typeface="Consolas" pitchFamily="34" charset="-120"/>
+              </a:rPr>
+              <a:t>: 6, </a:t>
+            </a:r>
+            <a:r>
+              <a:rPr lang="en-US" sz="1400" dirty="0">
+                <a:solidFill>
+                  <a:srgbClr val="FFFF00"/>
+                </a:solidFill>
+                <a:latin typeface="Consolas" pitchFamily="34" charset="0"/>
+                <a:ea typeface="Consolas" pitchFamily="34" charset="-122"/>
+                <a:cs typeface="Consolas" pitchFamily="34" charset="-120"/>
+              </a:rPr>
+              <a:t>loc</a:t>
+            </a:r>
+            <a:r>
+              <a:rPr lang="en-US" sz="1400" dirty="0">
+                <a:solidFill>
+                  <a:srgbClr val="CFE3FF"/>
+                </a:solidFill>
+                <a:latin typeface="Consolas" pitchFamily="34" charset="0"/>
+                <a:ea typeface="Consolas" pitchFamily="34" charset="-122"/>
+                <a:cs typeface="Consolas" pitchFamily="34" charset="-120"/>
+              </a:rPr>
+              <a:t>: "지하 1층" },</a:t>
             </a:r>
             <a:endParaRPr lang="en-US" sz="1400" dirty="0"/>
           </a:p>
@@ -5790,18 +5854,18 @@
                 <a:ea typeface="Consolas" pitchFamily="34" charset="-122"/>
                 <a:cs typeface="Consolas" pitchFamily="34" charset="-120"/>
               </a:rPr>
-              <a:t xml:space="preserve">    </a:t>
-            </a:r>
-            <a:r>
-              <a:rPr lang="en-US" sz="1400" dirty="0">
-                <a:solidFill>
-                  <a:srgbClr val="FFFF00"/>
+              <a:t>  // ... 서울 </a:t>
+            </a:r>
+            <a:r>
+              <a:rPr lang="en-US" sz="1400" dirty="0" err="1">
+                <a:solidFill>
+                  <a:srgbClr val="CFE3FF"/>
                 </a:solidFill>
                 <a:latin typeface="Consolas" pitchFamily="34" charset="0"/>
                 <a:ea typeface="Consolas" pitchFamily="34" charset="-122"/>
                 <a:cs typeface="Consolas" pitchFamily="34" charset="-120"/>
               </a:rPr>
-              <a:t>clean</a:t>
+              <a:t>전역</a:t>
             </a:r>
             <a:r>
               <a:rPr lang="en-US" sz="1400" dirty="0">
@@ -5812,18 +5876,18 @@
                 <a:ea typeface="Consolas" pitchFamily="34" charset="-122"/>
                 <a:cs typeface="Consolas" pitchFamily="34" charset="-120"/>
               </a:rPr>
-              <a:t xml:space="preserve">: 85, </a:t>
-            </a:r>
-            <a:r>
-              <a:rPr lang="en-US" sz="1400" dirty="0">
-                <a:solidFill>
-                  <a:srgbClr val="FFFF00"/>
+              <a:t> </a:t>
+            </a:r>
+            <a:r>
+              <a:rPr lang="en-US" altLang="ko-KR" sz="1400" dirty="0">
+                <a:solidFill>
+                  <a:srgbClr val="CFE3FF"/>
                 </a:solidFill>
                 <a:latin typeface="Consolas" pitchFamily="34" charset="0"/>
                 <a:ea typeface="Consolas" pitchFamily="34" charset="-122"/>
                 <a:cs typeface="Consolas" pitchFamily="34" charset="-120"/>
               </a:rPr>
-              <a:t>stalls</a:t>
+              <a:t>4000</a:t>
             </a:r>
             <a:r>
               <a:rPr lang="en-US" sz="1400" dirty="0">
@@ -5834,193 +5898,431 @@
                 <a:ea typeface="Consolas" pitchFamily="34" charset="-122"/>
                 <a:cs typeface="Consolas" pitchFamily="34" charset="-120"/>
               </a:rPr>
-              <a:t xml:space="preserve">: 6, </a:t>
-            </a:r>
+              <a:t>여 곳의 화장실 데이터</a:t>
+            </a:r>
+            <a:endParaRPr lang="en-US" sz="1400" dirty="0"/>
+          </a:p>
+          <a:p>
+            <a:pPr marL="0" indent="0">
+              <a:lnSpc>
+                <a:spcPct val="118000"/>
+              </a:lnSpc>
+              <a:buNone/>
+            </a:pPr>
             <a:r>
               <a:rPr lang="en-US" sz="1400" dirty="0">
                 <a:solidFill>
-                  <a:srgbClr val="FFFF00"/>
+                  <a:srgbClr val="CFE3FF"/>
                 </a:solidFill>
                 <a:latin typeface="Consolas" pitchFamily="34" charset="0"/>
                 <a:ea typeface="Consolas" pitchFamily="34" charset="-122"/>
                 <a:cs typeface="Consolas" pitchFamily="34" charset="-120"/>
               </a:rPr>
-              <a:t>loc</a:t>
-            </a:r>
-            <a:r>
-              <a:rPr lang="en-US" sz="1400" dirty="0">
-                <a:solidFill>
-                  <a:srgbClr val="CFE3FF"/>
+              <a:t>];</a:t>
+            </a:r>
+            <a:endParaRPr lang="en-US" sz="1400" dirty="0"/>
+          </a:p>
+        </p:txBody>
+      </p:sp>
+      <p:sp>
+        <p:nvSpPr>
+          <p:cNvPr id="7" name="Shape 5"/>
+          <p:cNvSpPr/>
+          <p:nvPr/>
+        </p:nvSpPr>
+        <p:spPr>
+          <a:xfrm>
+            <a:off x="6400800" y="2121408"/>
+            <a:ext cx="146304" cy="146304"/>
+          </a:xfrm>
+          <a:prstGeom prst="ellipse">
+            <a:avLst/>
+          </a:prstGeom>
+          <a:solidFill>
+            <a:srgbClr val="FFC107"/>
+          </a:solidFill>
+          <a:ln/>
+        </p:spPr>
+        <p:txBody>
+          <a:bodyPr/>
+          <a:lstStyle/>
+          <a:p>
+            <a:endParaRPr lang="ko-KR" altLang="en-US"/>
+          </a:p>
+        </p:txBody>
+      </p:sp>
+      <p:sp>
+        <p:nvSpPr>
+          <p:cNvPr id="8" name="Text 6"/>
+          <p:cNvSpPr/>
+          <p:nvPr/>
+        </p:nvSpPr>
+        <p:spPr>
+          <a:xfrm>
+            <a:off x="6675120" y="1993392"/>
+            <a:ext cx="4206240" cy="320040"/>
+          </a:xfrm>
+          <a:prstGeom prst="rect">
+            <a:avLst/>
+          </a:prstGeom>
+          <a:noFill/>
+          <a:ln/>
+        </p:spPr>
+        <p:txBody>
+          <a:bodyPr wrap="square" lIns="0" tIns="0" rIns="0" bIns="0" rtlCol="0" anchor="ctr"/>
+          <a:lstStyle/>
+          <a:p>
+            <a:pPr marL="0" indent="0">
+              <a:buNone/>
+            </a:pPr>
+            <a:r>
+              <a:rPr lang="en-US" sz="1400" b="1" dirty="0">
+                <a:solidFill>
+                  <a:srgbClr val="1B3A63"/>
                 </a:solidFill>
                 <a:latin typeface="Consolas" pitchFamily="34" charset="0"/>
                 <a:ea typeface="Consolas" pitchFamily="34" charset="-122"/>
                 <a:cs typeface="Consolas" pitchFamily="34" charset="-120"/>
               </a:rPr>
-              <a:t>: "지하 1층" },</a:t>
+              <a:t>lat / lng</a:t>
             </a:r>
             <a:endParaRPr lang="en-US" sz="1400" dirty="0"/>
           </a:p>
+        </p:txBody>
+      </p:sp>
+      <p:sp>
+        <p:nvSpPr>
+          <p:cNvPr id="9" name="Text 7"/>
+          <p:cNvSpPr/>
+          <p:nvPr/>
+        </p:nvSpPr>
+        <p:spPr>
+          <a:xfrm>
+            <a:off x="6675120" y="2313432"/>
+            <a:ext cx="4297680" cy="502920"/>
+          </a:xfrm>
+          <a:prstGeom prst="rect">
+            <a:avLst/>
+          </a:prstGeom>
+          <a:noFill/>
+          <a:ln/>
+        </p:spPr>
+        <p:txBody>
+          <a:bodyPr wrap="square" lIns="0" tIns="0" rIns="0" bIns="0" rtlCol="0" anchor="ctr"/>
+          <a:lstStyle/>
           <a:p>
             <a:pPr marL="0" indent="0">
               <a:lnSpc>
-                <a:spcPct val="118000"/>
+                <a:spcPct val="120000"/>
               </a:lnSpc>
               <a:buNone/>
             </a:pPr>
             <a:r>
-              <a:rPr lang="en-US" sz="1400" dirty="0">
-                <a:solidFill>
-                  <a:srgbClr val="CFE3FF"/>
+              <a:rPr lang="en-US" sz="1250" dirty="0">
+                <a:solidFill>
+                  <a:srgbClr val="5C7088"/>
+                </a:solidFill>
+                <a:latin typeface="맑은 고딕" pitchFamily="34" charset="0"/>
+                <a:ea typeface="맑은 고딕" pitchFamily="34" charset="-122"/>
+                <a:cs typeface="맑은 고딕" pitchFamily="34" charset="-120"/>
+              </a:rPr>
+              <a:t>지도에 표시할 위경도 좌표</a:t>
+            </a:r>
+            <a:endParaRPr lang="en-US" sz="1250" dirty="0"/>
+          </a:p>
+        </p:txBody>
+      </p:sp>
+      <p:sp>
+        <p:nvSpPr>
+          <p:cNvPr id="10" name="Shape 8"/>
+          <p:cNvSpPr/>
+          <p:nvPr/>
+        </p:nvSpPr>
+        <p:spPr>
+          <a:xfrm>
+            <a:off x="6400800" y="2898648"/>
+            <a:ext cx="146304" cy="146304"/>
+          </a:xfrm>
+          <a:prstGeom prst="ellipse">
+            <a:avLst/>
+          </a:prstGeom>
+          <a:solidFill>
+            <a:srgbClr val="FFC107"/>
+          </a:solidFill>
+          <a:ln/>
+        </p:spPr>
+        <p:txBody>
+          <a:bodyPr/>
+          <a:lstStyle/>
+          <a:p>
+            <a:endParaRPr lang="ko-KR" altLang="en-US"/>
+          </a:p>
+        </p:txBody>
+      </p:sp>
+      <p:sp>
+        <p:nvSpPr>
+          <p:cNvPr id="11" name="Text 9"/>
+          <p:cNvSpPr/>
+          <p:nvPr/>
+        </p:nvSpPr>
+        <p:spPr>
+          <a:xfrm>
+            <a:off x="6675120" y="2770632"/>
+            <a:ext cx="4206240" cy="320040"/>
+          </a:xfrm>
+          <a:prstGeom prst="rect">
+            <a:avLst/>
+          </a:prstGeom>
+          <a:noFill/>
+          <a:ln/>
+        </p:spPr>
+        <p:txBody>
+          <a:bodyPr wrap="square" lIns="0" tIns="0" rIns="0" bIns="0" rtlCol="0" anchor="ctr"/>
+          <a:lstStyle/>
+          <a:p>
+            <a:pPr marL="0" indent="0">
+              <a:buNone/>
+            </a:pPr>
+            <a:r>
+              <a:rPr lang="en-US" sz="1400" b="1" dirty="0">
+                <a:solidFill>
+                  <a:srgbClr val="1B3A63"/>
                 </a:solidFill>
                 <a:latin typeface="Consolas" pitchFamily="34" charset="0"/>
                 <a:ea typeface="Consolas" pitchFamily="34" charset="-122"/>
                 <a:cs typeface="Consolas" pitchFamily="34" charset="-120"/>
               </a:rPr>
-              <a:t xml:space="preserve">  // ... 서울 </a:t>
-            </a:r>
-            <a:r>
-              <a:rPr lang="en-US" sz="1400" dirty="0" err="1">
-                <a:solidFill>
-                  <a:srgbClr val="CFE3FF"/>
+              <a:t>type</a:t>
+            </a:r>
+            <a:endParaRPr lang="en-US" sz="1400" dirty="0"/>
+          </a:p>
+        </p:txBody>
+      </p:sp>
+      <p:sp>
+        <p:nvSpPr>
+          <p:cNvPr id="12" name="Text 10"/>
+          <p:cNvSpPr/>
+          <p:nvPr/>
+        </p:nvSpPr>
+        <p:spPr>
+          <a:xfrm>
+            <a:off x="6675120" y="3090672"/>
+            <a:ext cx="4297680" cy="502920"/>
+          </a:xfrm>
+          <a:prstGeom prst="rect">
+            <a:avLst/>
+          </a:prstGeom>
+          <a:noFill/>
+          <a:ln/>
+        </p:spPr>
+        <p:txBody>
+          <a:bodyPr wrap="square" lIns="0" tIns="0" rIns="0" bIns="0" rtlCol="0" anchor="ctr"/>
+          <a:lstStyle/>
+          <a:p>
+            <a:pPr marL="0" indent="0">
+              <a:lnSpc>
+                <a:spcPct val="120000"/>
+              </a:lnSpc>
+              <a:buNone/>
+            </a:pPr>
+            <a:r>
+              <a:rPr lang="en-US" sz="1250" dirty="0">
+                <a:solidFill>
+                  <a:srgbClr val="5C7088"/>
+                </a:solidFill>
+                <a:latin typeface="맑은 고딕" pitchFamily="34" charset="0"/>
+                <a:ea typeface="맑은 고딕" pitchFamily="34" charset="-122"/>
+                <a:cs typeface="맑은 고딕" pitchFamily="34" charset="-120"/>
+              </a:rPr>
+              <a:t>"public"(공용) / "secret"(비밀)</a:t>
+            </a:r>
+            <a:endParaRPr lang="en-US" sz="1250" dirty="0"/>
+          </a:p>
+        </p:txBody>
+      </p:sp>
+      <p:sp>
+        <p:nvSpPr>
+          <p:cNvPr id="13" name="Shape 11"/>
+          <p:cNvSpPr/>
+          <p:nvPr/>
+        </p:nvSpPr>
+        <p:spPr>
+          <a:xfrm>
+            <a:off x="6400800" y="3675888"/>
+            <a:ext cx="146304" cy="146304"/>
+          </a:xfrm>
+          <a:prstGeom prst="ellipse">
+            <a:avLst/>
+          </a:prstGeom>
+          <a:solidFill>
+            <a:srgbClr val="FFC107"/>
+          </a:solidFill>
+          <a:ln/>
+        </p:spPr>
+        <p:txBody>
+          <a:bodyPr/>
+          <a:lstStyle/>
+          <a:p>
+            <a:endParaRPr lang="ko-KR" altLang="en-US"/>
+          </a:p>
+        </p:txBody>
+      </p:sp>
+      <p:sp>
+        <p:nvSpPr>
+          <p:cNvPr id="14" name="Text 12"/>
+          <p:cNvSpPr/>
+          <p:nvPr/>
+        </p:nvSpPr>
+        <p:spPr>
+          <a:xfrm>
+            <a:off x="6675120" y="3547872"/>
+            <a:ext cx="4206240" cy="320040"/>
+          </a:xfrm>
+          <a:prstGeom prst="rect">
+            <a:avLst/>
+          </a:prstGeom>
+          <a:noFill/>
+          <a:ln/>
+        </p:spPr>
+        <p:txBody>
+          <a:bodyPr wrap="square" lIns="0" tIns="0" rIns="0" bIns="0" rtlCol="0" anchor="ctr"/>
+          <a:lstStyle/>
+          <a:p>
+            <a:pPr marL="0" indent="0">
+              <a:buNone/>
+            </a:pPr>
+            <a:r>
+              <a:rPr lang="en-US" sz="1400" b="1" dirty="0">
+                <a:solidFill>
+                  <a:srgbClr val="1B3A63"/>
                 </a:solidFill>
                 <a:latin typeface="Consolas" pitchFamily="34" charset="0"/>
                 <a:ea typeface="Consolas" pitchFamily="34" charset="-122"/>
                 <a:cs typeface="Consolas" pitchFamily="34" charset="-120"/>
               </a:rPr>
-              <a:t>전역</a:t>
-            </a:r>
-            <a:r>
-              <a:rPr lang="en-US" sz="1400" dirty="0">
-                <a:solidFill>
-                  <a:srgbClr val="CFE3FF"/>
+              <a:t>rating / reviews</a:t>
+            </a:r>
+            <a:endParaRPr lang="en-US" sz="1400" dirty="0"/>
+          </a:p>
+        </p:txBody>
+      </p:sp>
+      <p:sp>
+        <p:nvSpPr>
+          <p:cNvPr id="15" name="Text 13"/>
+          <p:cNvSpPr/>
+          <p:nvPr/>
+        </p:nvSpPr>
+        <p:spPr>
+          <a:xfrm>
+            <a:off x="6675120" y="3867912"/>
+            <a:ext cx="4297680" cy="502920"/>
+          </a:xfrm>
+          <a:prstGeom prst="rect">
+            <a:avLst/>
+          </a:prstGeom>
+          <a:noFill/>
+          <a:ln/>
+        </p:spPr>
+        <p:txBody>
+          <a:bodyPr wrap="square" lIns="0" tIns="0" rIns="0" bIns="0" rtlCol="0" anchor="ctr"/>
+          <a:lstStyle/>
+          <a:p>
+            <a:pPr marL="0" indent="0">
+              <a:lnSpc>
+                <a:spcPct val="120000"/>
+              </a:lnSpc>
+              <a:buNone/>
+            </a:pPr>
+            <a:r>
+              <a:rPr lang="en-US" sz="1250" dirty="0">
+                <a:solidFill>
+                  <a:srgbClr val="5C7088"/>
+                </a:solidFill>
+                <a:latin typeface="맑은 고딕" pitchFamily="34" charset="0"/>
+                <a:ea typeface="맑은 고딕" pitchFamily="34" charset="-122"/>
+                <a:cs typeface="맑은 고딕" pitchFamily="34" charset="-120"/>
+              </a:rPr>
+              <a:t>평균 별점과 누적 리뷰 수</a:t>
+            </a:r>
+            <a:endParaRPr lang="en-US" sz="1250" dirty="0"/>
+          </a:p>
+        </p:txBody>
+      </p:sp>
+      <p:sp>
+        <p:nvSpPr>
+          <p:cNvPr id="16" name="Shape 14"/>
+          <p:cNvSpPr/>
+          <p:nvPr/>
+        </p:nvSpPr>
+        <p:spPr>
+          <a:xfrm>
+            <a:off x="6400800" y="4453128"/>
+            <a:ext cx="146304" cy="146304"/>
+          </a:xfrm>
+          <a:prstGeom prst="ellipse">
+            <a:avLst/>
+          </a:prstGeom>
+          <a:solidFill>
+            <a:srgbClr val="FFC107"/>
+          </a:solidFill>
+          <a:ln/>
+        </p:spPr>
+        <p:txBody>
+          <a:bodyPr/>
+          <a:lstStyle/>
+          <a:p>
+            <a:endParaRPr lang="ko-KR" altLang="en-US"/>
+          </a:p>
+        </p:txBody>
+      </p:sp>
+      <p:sp>
+        <p:nvSpPr>
+          <p:cNvPr id="17" name="Text 15"/>
+          <p:cNvSpPr/>
+          <p:nvPr/>
+        </p:nvSpPr>
+        <p:spPr>
+          <a:xfrm>
+            <a:off x="6675120" y="4325112"/>
+            <a:ext cx="4206240" cy="320040"/>
+          </a:xfrm>
+          <a:prstGeom prst="rect">
+            <a:avLst/>
+          </a:prstGeom>
+          <a:noFill/>
+          <a:ln/>
+        </p:spPr>
+        <p:txBody>
+          <a:bodyPr wrap="square" lIns="0" tIns="0" rIns="0" bIns="0" rtlCol="0" anchor="ctr"/>
+          <a:lstStyle/>
+          <a:p>
+            <a:pPr marL="0" indent="0">
+              <a:buNone/>
+            </a:pPr>
+            <a:r>
+              <a:rPr lang="en-US" sz="1400" b="1" dirty="0">
+                <a:solidFill>
+                  <a:srgbClr val="1B3A63"/>
                 </a:solidFill>
                 <a:latin typeface="Consolas" pitchFamily="34" charset="0"/>
                 <a:ea typeface="Consolas" pitchFamily="34" charset="-122"/>
                 <a:cs typeface="Consolas" pitchFamily="34" charset="-120"/>
               </a:rPr>
-              <a:t xml:space="preserve"> </a:t>
-            </a:r>
-            <a:r>
-              <a:rPr lang="en-US" altLang="ko-KR" sz="1400" dirty="0">
-                <a:solidFill>
-                  <a:srgbClr val="CFE3FF"/>
-                </a:solidFill>
-                <a:latin typeface="Consolas" pitchFamily="34" charset="0"/>
-                <a:ea typeface="Consolas" pitchFamily="34" charset="-122"/>
-                <a:cs typeface="Consolas" pitchFamily="34" charset="-120"/>
-              </a:rPr>
-              <a:t>4000</a:t>
-            </a:r>
-            <a:r>
-              <a:rPr lang="en-US" sz="1400" dirty="0">
-                <a:solidFill>
-                  <a:srgbClr val="CFE3FF"/>
-                </a:solidFill>
-                <a:latin typeface="Consolas" pitchFamily="34" charset="0"/>
-                <a:ea typeface="Consolas" pitchFamily="34" charset="-122"/>
-                <a:cs typeface="Consolas" pitchFamily="34" charset="-120"/>
-              </a:rPr>
-              <a:t>여 곳의 화장실 데이터</a:t>
+              <a:t>open24h / disabled</a:t>
             </a:r>
             <a:endParaRPr lang="en-US" sz="1400" dirty="0"/>
           </a:p>
-          <a:p>
-            <a:pPr marL="0" indent="0">
-              <a:lnSpc>
-                <a:spcPct val="118000"/>
-              </a:lnSpc>
-              <a:buNone/>
-            </a:pPr>
-            <a:r>
-              <a:rPr lang="en-US" sz="1400" dirty="0">
-                <a:solidFill>
-                  <a:srgbClr val="CFE3FF"/>
-                </a:solidFill>
-                <a:latin typeface="Consolas" pitchFamily="34" charset="0"/>
-                <a:ea typeface="Consolas" pitchFamily="34" charset="-122"/>
-                <a:cs typeface="Consolas" pitchFamily="34" charset="-120"/>
-              </a:rPr>
-              <a:t>];</a:t>
-            </a:r>
-            <a:endParaRPr lang="en-US" sz="1400" dirty="0"/>
-          </a:p>
-        </p:txBody>
-      </p:sp>
-      <p:sp>
-        <p:nvSpPr>
-          <p:cNvPr id="7" name="Shape 5"/>
-          <p:cNvSpPr/>
-          <p:nvPr/>
-        </p:nvSpPr>
-        <p:spPr>
-          <a:xfrm>
-            <a:off x="6400800" y="2121408"/>
-            <a:ext cx="146304" cy="146304"/>
-          </a:xfrm>
-          <a:prstGeom prst="ellipse">
-            <a:avLst/>
-          </a:prstGeom>
-          <a:solidFill>
-            <a:srgbClr val="FFC107"/>
-          </a:solidFill>
-          <a:ln/>
-        </p:spPr>
-        <p:txBody>
-          <a:bodyPr/>
-          <a:lstStyle/>
-          <a:p>
-            <a:endParaRPr lang="ko-KR" altLang="en-US"/>
-          </a:p>
-        </p:txBody>
-      </p:sp>
-      <p:sp>
-        <p:nvSpPr>
-          <p:cNvPr id="8" name="Text 6"/>
-          <p:cNvSpPr/>
-          <p:nvPr/>
-        </p:nvSpPr>
-        <p:spPr>
-          <a:xfrm>
-            <a:off x="6675120" y="1993392"/>
-            <a:ext cx="4206240" cy="320040"/>
-          </a:xfrm>
-          <a:prstGeom prst="rect">
-            <a:avLst/>
-          </a:prstGeom>
-          <a:noFill/>
-          <a:ln/>
-        </p:spPr>
-        <p:txBody>
-          <a:bodyPr wrap="square" lIns="0" tIns="0" rIns="0" bIns="0" rtlCol="0" anchor="ctr"/>
-          <a:lstStyle/>
-          <a:p>
-            <a:pPr marL="0" indent="0">
-              <a:buNone/>
-            </a:pPr>
-            <a:r>
-              <a:rPr lang="en-US" sz="1400" b="1" dirty="0">
-                <a:solidFill>
-                  <a:srgbClr val="1B3A63"/>
-                </a:solidFill>
-                <a:latin typeface="Consolas" pitchFamily="34" charset="0"/>
-                <a:ea typeface="Consolas" pitchFamily="34" charset="-122"/>
-                <a:cs typeface="Consolas" pitchFamily="34" charset="-120"/>
-              </a:rPr>
-              <a:t>lat / lng</a:t>
-            </a:r>
-            <a:endParaRPr lang="en-US" sz="1400" dirty="0"/>
-          </a:p>
-        </p:txBody>
-      </p:sp>
-      <p:sp>
-        <p:nvSpPr>
-          <p:cNvPr id="9" name="Text 7"/>
-          <p:cNvSpPr/>
-          <p:nvPr/>
-        </p:nvSpPr>
-        <p:spPr>
-          <a:xfrm>
-            <a:off x="6675120" y="2313432"/>
+        </p:txBody>
+      </p:sp>
+      <p:sp>
+        <p:nvSpPr>
+          <p:cNvPr id="18" name="Text 16"/>
+          <p:cNvSpPr/>
+          <p:nvPr/>
+        </p:nvSpPr>
+        <p:spPr>
+          <a:xfrm>
+            <a:off x="6675120" y="4645152"/>
             <a:ext cx="4297680" cy="502920"/>
           </a:xfrm>
           <a:prstGeom prst="rect">
@@ -6048,331 +6350,7 @@
                 <a:ea typeface="맑은 고딕" pitchFamily="34" charset="-122"/>
                 <a:cs typeface="맑은 고딕" pitchFamily="34" charset="-120"/>
               </a:rPr>
-              <a:t>지도에 표시할 위경도 좌표</a:t>
-            </a:r>
-            <a:endParaRPr lang="en-US" sz="1250" dirty="0"/>
-          </a:p>
-        </p:txBody>
-      </p:sp>
-      <p:sp>
-        <p:nvSpPr>
-          <p:cNvPr id="10" name="Shape 8"/>
-          <p:cNvSpPr/>
-          <p:nvPr/>
-        </p:nvSpPr>
-        <p:spPr>
-          <a:xfrm>
-            <a:off x="6400800" y="2898648"/>
-            <a:ext cx="146304" cy="146304"/>
-          </a:xfrm>
-          <a:prstGeom prst="ellipse">
-            <a:avLst/>
-          </a:prstGeom>
-          <a:solidFill>
-            <a:srgbClr val="FFC107"/>
-          </a:solidFill>
-          <a:ln/>
-        </p:spPr>
-        <p:txBody>
-          <a:bodyPr/>
-          <a:lstStyle/>
-          <a:p>
-            <a:endParaRPr lang="ko-KR" altLang="en-US"/>
-          </a:p>
-        </p:txBody>
-      </p:sp>
-      <p:sp>
-        <p:nvSpPr>
-          <p:cNvPr id="11" name="Text 9"/>
-          <p:cNvSpPr/>
-          <p:nvPr/>
-        </p:nvSpPr>
-        <p:spPr>
-          <a:xfrm>
-            <a:off x="6675120" y="2770632"/>
-            <a:ext cx="4206240" cy="320040"/>
-          </a:xfrm>
-          <a:prstGeom prst="rect">
-            <a:avLst/>
-          </a:prstGeom>
-          <a:noFill/>
-          <a:ln/>
-        </p:spPr>
-        <p:txBody>
-          <a:bodyPr wrap="square" lIns="0" tIns="0" rIns="0" bIns="0" rtlCol="0" anchor="ctr"/>
-          <a:lstStyle/>
-          <a:p>
-            <a:pPr marL="0" indent="0">
-              <a:buNone/>
-            </a:pPr>
-            <a:r>
-              <a:rPr lang="en-US" sz="1400" b="1" dirty="0">
-                <a:solidFill>
-                  <a:srgbClr val="1B3A63"/>
-                </a:solidFill>
-                <a:latin typeface="Consolas" pitchFamily="34" charset="0"/>
-                <a:ea typeface="Consolas" pitchFamily="34" charset="-122"/>
-                <a:cs typeface="Consolas" pitchFamily="34" charset="-120"/>
-              </a:rPr>
-              <a:t>type</a:t>
-            </a:r>
-            <a:endParaRPr lang="en-US" sz="1400" dirty="0"/>
-          </a:p>
-        </p:txBody>
-      </p:sp>
-      <p:sp>
-        <p:nvSpPr>
-          <p:cNvPr id="12" name="Text 10"/>
-          <p:cNvSpPr/>
-          <p:nvPr/>
-        </p:nvSpPr>
-        <p:spPr>
-          <a:xfrm>
-            <a:off x="6675120" y="3090672"/>
-            <a:ext cx="4297680" cy="502920"/>
-          </a:xfrm>
-          <a:prstGeom prst="rect">
-            <a:avLst/>
-          </a:prstGeom>
-          <a:noFill/>
-          <a:ln/>
-        </p:spPr>
-        <p:txBody>
-          <a:bodyPr wrap="square" lIns="0" tIns="0" rIns="0" bIns="0" rtlCol="0" anchor="ctr"/>
-          <a:lstStyle/>
-          <a:p>
-            <a:pPr marL="0" indent="0">
-              <a:lnSpc>
-                <a:spcPct val="120000"/>
-              </a:lnSpc>
-              <a:buNone/>
-            </a:pPr>
-            <a:r>
-              <a:rPr lang="en-US" sz="1250" dirty="0">
-                <a:solidFill>
-                  <a:srgbClr val="5C7088"/>
-                </a:solidFill>
-                <a:latin typeface="맑은 고딕" pitchFamily="34" charset="0"/>
-                <a:ea typeface="맑은 고딕" pitchFamily="34" charset="-122"/>
-                <a:cs typeface="맑은 고딕" pitchFamily="34" charset="-120"/>
-              </a:rPr>
-              <a:t>"public"(공용) / "secret"(비밀)</a:t>
-            </a:r>
-            <a:endParaRPr lang="en-US" sz="1250" dirty="0"/>
-          </a:p>
-        </p:txBody>
-      </p:sp>
-      <p:sp>
-        <p:nvSpPr>
-          <p:cNvPr id="13" name="Shape 11"/>
-          <p:cNvSpPr/>
-          <p:nvPr/>
-        </p:nvSpPr>
-        <p:spPr>
-          <a:xfrm>
-            <a:off x="6400800" y="3675888"/>
-            <a:ext cx="146304" cy="146304"/>
-          </a:xfrm>
-          <a:prstGeom prst="ellipse">
-            <a:avLst/>
-          </a:prstGeom>
-          <a:solidFill>
-            <a:srgbClr val="FFC107"/>
-          </a:solidFill>
-          <a:ln/>
-        </p:spPr>
-        <p:txBody>
-          <a:bodyPr/>
-          <a:lstStyle/>
-          <a:p>
-            <a:endParaRPr lang="ko-KR" altLang="en-US"/>
-          </a:p>
-        </p:txBody>
-      </p:sp>
-      <p:sp>
-        <p:nvSpPr>
-          <p:cNvPr id="14" name="Text 12"/>
-          <p:cNvSpPr/>
-          <p:nvPr/>
-        </p:nvSpPr>
-        <p:spPr>
-          <a:xfrm>
-            <a:off x="6675120" y="3547872"/>
-            <a:ext cx="4206240" cy="320040"/>
-          </a:xfrm>
-          <a:prstGeom prst="rect">
-            <a:avLst/>
-          </a:prstGeom>
-          <a:noFill/>
-          <a:ln/>
-        </p:spPr>
-        <p:txBody>
-          <a:bodyPr wrap="square" lIns="0" tIns="0" rIns="0" bIns="0" rtlCol="0" anchor="ctr"/>
-          <a:lstStyle/>
-          <a:p>
-            <a:pPr marL="0" indent="0">
-              <a:buNone/>
-            </a:pPr>
-            <a:r>
-              <a:rPr lang="en-US" sz="1400" b="1" dirty="0">
-                <a:solidFill>
-                  <a:srgbClr val="1B3A63"/>
-                </a:solidFill>
-                <a:latin typeface="Consolas" pitchFamily="34" charset="0"/>
-                <a:ea typeface="Consolas" pitchFamily="34" charset="-122"/>
-                <a:cs typeface="Consolas" pitchFamily="34" charset="-120"/>
-              </a:rPr>
-              <a:t>rating / reviews</a:t>
-            </a:r>
-            <a:endParaRPr lang="en-US" sz="1400" dirty="0"/>
-          </a:p>
-        </p:txBody>
-      </p:sp>
-      <p:sp>
-        <p:nvSpPr>
-          <p:cNvPr id="15" name="Text 13"/>
-          <p:cNvSpPr/>
-          <p:nvPr/>
-        </p:nvSpPr>
-        <p:spPr>
-          <a:xfrm>
-            <a:off x="6675120" y="3867912"/>
-            <a:ext cx="4297680" cy="502920"/>
-          </a:xfrm>
-          <a:prstGeom prst="rect">
-            <a:avLst/>
-          </a:prstGeom>
-          <a:noFill/>
-          <a:ln/>
-        </p:spPr>
-        <p:txBody>
-          <a:bodyPr wrap="square" lIns="0" tIns="0" rIns="0" bIns="0" rtlCol="0" anchor="ctr"/>
-          <a:lstStyle/>
-          <a:p>
-            <a:pPr marL="0" indent="0">
-              <a:lnSpc>
-                <a:spcPct val="120000"/>
-              </a:lnSpc>
-              <a:buNone/>
-            </a:pPr>
-            <a:r>
-              <a:rPr lang="en-US" sz="1250" dirty="0">
-                <a:solidFill>
-                  <a:srgbClr val="5C7088"/>
-                </a:solidFill>
-                <a:latin typeface="맑은 고딕" pitchFamily="34" charset="0"/>
-                <a:ea typeface="맑은 고딕" pitchFamily="34" charset="-122"/>
-                <a:cs typeface="맑은 고딕" pitchFamily="34" charset="-120"/>
-              </a:rPr>
-              <a:t>평균 별점과 누적 리뷰 수</a:t>
-            </a:r>
-            <a:endParaRPr lang="en-US" sz="1250" dirty="0"/>
-          </a:p>
-        </p:txBody>
-      </p:sp>
-      <p:sp>
-        <p:nvSpPr>
-          <p:cNvPr id="16" name="Shape 14"/>
-          <p:cNvSpPr/>
-          <p:nvPr/>
-        </p:nvSpPr>
-        <p:spPr>
-          <a:xfrm>
-            <a:off x="6400800" y="4453128"/>
-            <a:ext cx="146304" cy="146304"/>
-          </a:xfrm>
-          <a:prstGeom prst="ellipse">
-            <a:avLst/>
-          </a:prstGeom>
-          <a:solidFill>
-            <a:srgbClr val="FFC107"/>
-          </a:solidFill>
-          <a:ln/>
-        </p:spPr>
-        <p:txBody>
-          <a:bodyPr/>
-          <a:lstStyle/>
-          <a:p>
-            <a:endParaRPr lang="ko-KR" altLang="en-US"/>
-          </a:p>
-        </p:txBody>
-      </p:sp>
-      <p:sp>
-        <p:nvSpPr>
-          <p:cNvPr id="17" name="Text 15"/>
-          <p:cNvSpPr/>
-          <p:nvPr/>
-        </p:nvSpPr>
-        <p:spPr>
-          <a:xfrm>
-            <a:off x="6675120" y="4325112"/>
-            <a:ext cx="4206240" cy="320040"/>
-          </a:xfrm>
-          <a:prstGeom prst="rect">
-            <a:avLst/>
-          </a:prstGeom>
-          <a:noFill/>
-          <a:ln/>
-        </p:spPr>
-        <p:txBody>
-          <a:bodyPr wrap="square" lIns="0" tIns="0" rIns="0" bIns="0" rtlCol="0" anchor="ctr"/>
-          <a:lstStyle/>
-          <a:p>
-            <a:pPr marL="0" indent="0">
-              <a:buNone/>
-            </a:pPr>
-            <a:r>
-              <a:rPr lang="en-US" sz="1400" b="1" dirty="0">
-                <a:solidFill>
-                  <a:srgbClr val="1B3A63"/>
-                </a:solidFill>
-                <a:latin typeface="Consolas" pitchFamily="34" charset="0"/>
-                <a:ea typeface="Consolas" pitchFamily="34" charset="-122"/>
-                <a:cs typeface="Consolas" pitchFamily="34" charset="-120"/>
-              </a:rPr>
-              <a:t>bidet / open24h / disabled</a:t>
-            </a:r>
-            <a:endParaRPr lang="en-US" sz="1400" dirty="0"/>
-          </a:p>
-        </p:txBody>
-      </p:sp>
-      <p:sp>
-        <p:nvSpPr>
-          <p:cNvPr id="18" name="Text 16"/>
-          <p:cNvSpPr/>
-          <p:nvPr/>
-        </p:nvSpPr>
-        <p:spPr>
-          <a:xfrm>
-            <a:off x="6675120" y="4645152"/>
-            <a:ext cx="4297680" cy="502920"/>
-          </a:xfrm>
-          <a:prstGeom prst="rect">
-            <a:avLst/>
-          </a:prstGeom>
-          <a:noFill/>
-          <a:ln/>
-        </p:spPr>
-        <p:txBody>
-          <a:bodyPr wrap="square" lIns="0" tIns="0" rIns="0" bIns="0" rtlCol="0" anchor="ctr"/>
-          <a:lstStyle/>
-          <a:p>
-            <a:pPr marL="0" indent="0">
-              <a:lnSpc>
-                <a:spcPct val="120000"/>
-              </a:lnSpc>
-              <a:buNone/>
-            </a:pPr>
-            <a:r>
-              <a:rPr lang="en-US" sz="1250" dirty="0">
-                <a:solidFill>
-                  <a:srgbClr val="5C7088"/>
-                </a:solidFill>
-                <a:latin typeface="맑은 고딕" pitchFamily="34" charset="0"/>
-                <a:ea typeface="맑은 고딕" pitchFamily="34" charset="-122"/>
-                <a:cs typeface="맑은 고딕" pitchFamily="34" charset="-120"/>
-              </a:rPr>
-              <a:t>비데·24시간·장애인용 여부 → 필터에 사용</a:t>
+              <a:t>24시간·장애인용 여부 → 필터에 사용</a:t>
             </a:r>
             <a:endParaRPr lang="en-US" sz="1250" dirty="0"/>
           </a:p>
@@ -6727,7 +6705,7 @@
                 <a:ea typeface="맑은 고딕" pitchFamily="34" charset="-122"/>
                 <a:cs typeface="맑은 고딕" pitchFamily="34" charset="-120"/>
               </a:rPr>
-              <a:t xml:space="preserve">Leaflet의 </a:t>
+              <a:t>Leaflet의 </a:t>
             </a:r>
             <a:r>
               <a:rPr lang="en-US" sz="1500" dirty="0" err="1">
@@ -6749,7 +6727,7 @@
                 <a:ea typeface="맑은 고딕" pitchFamily="34" charset="-122"/>
                 <a:cs typeface="맑은 고딕" pitchFamily="34" charset="-120"/>
               </a:rPr>
-              <a:t xml:space="preserve"> HTML 마커를 화장실 종류별 </a:t>
+              <a:t> HTML 마커를 화장실 종류별 </a:t>
             </a:r>
             <a:r>
               <a:rPr lang="en-US" sz="1500" dirty="0" err="1">
@@ -6771,7 +6749,7 @@
                 <a:ea typeface="맑은 고딕" pitchFamily="34" charset="-122"/>
                 <a:cs typeface="맑은 고딕" pitchFamily="34" charset="-120"/>
               </a:rPr>
-              <a:t xml:space="preserve"> </a:t>
+              <a:t> </a:t>
             </a:r>
             <a:r>
               <a:rPr lang="en-US" sz="1500" dirty="0" err="1">
@@ -6871,7 +6849,7 @@
                 <a:ea typeface="Consolas" pitchFamily="34" charset="-122"/>
                 <a:cs typeface="Consolas" pitchFamily="34" charset="-120"/>
               </a:rPr>
-              <a:t xml:space="preserve">function </a:t>
+              <a:t>function </a:t>
             </a:r>
             <a:r>
               <a:rPr lang="en-US" sz="1300" dirty="0">
@@ -6913,7 +6891,7 @@
                 <a:ea typeface="Consolas" pitchFamily="34" charset="-122"/>
                 <a:cs typeface="Consolas" pitchFamily="34" charset="-120"/>
               </a:rPr>
-              <a:t xml:space="preserve">  const c = type === 'public' ? '#2979ff' : '#ffc107';</a:t>
+              <a:t>  const c = type === 'public' ? '#2979ff' : '#ffc107';</a:t>
             </a:r>
             <a:endParaRPr lang="en-US" sz="1300" dirty="0"/>
           </a:p>
@@ -6933,7 +6911,7 @@
                 <a:ea typeface="Consolas" pitchFamily="34" charset="-122"/>
                 <a:cs typeface="Consolas" pitchFamily="34" charset="-120"/>
               </a:rPr>
-              <a:t xml:space="preserve">  const e = type === 'public' ? '🚻' : '🔒';</a:t>
+              <a:t>  const e = type === 'public' ? '🚻' : '🔒';</a:t>
             </a:r>
             <a:endParaRPr lang="en-US" sz="1300" dirty="0"/>
           </a:p>
@@ -6953,7 +6931,7 @@
                 <a:ea typeface="Consolas" pitchFamily="34" charset="-122"/>
                 <a:cs typeface="Consolas" pitchFamily="34" charset="-120"/>
               </a:rPr>
-              <a:t xml:space="preserve">  return L.divIcon({ html: `</a:t>
+              <a:t>  return L.divIcon({ html: `</a:t>
             </a:r>
             <a:endParaRPr lang="en-US" sz="1300" dirty="0"/>
           </a:p>
@@ -6973,7 +6951,7 @@
                 <a:ea typeface="Consolas" pitchFamily="34" charset="-122"/>
                 <a:cs typeface="Consolas" pitchFamily="34" charset="-120"/>
               </a:rPr>
-              <a:t xml:space="preserve">    &lt;div style="width:38px;height:38px;</a:t>
+              <a:t>    &lt;div style="width:38px;height:38px;</a:t>
             </a:r>
             <a:endParaRPr lang="en-US" sz="1300" dirty="0"/>
           </a:p>
@@ -6993,7 +6971,7 @@
                 <a:ea typeface="Consolas" pitchFamily="34" charset="-122"/>
                 <a:cs typeface="Consolas" pitchFamily="34" charset="-120"/>
               </a:rPr>
-              <a:t xml:space="preserve">      background:${c}; border-radius:50% 50% 50% 0;</a:t>
+              <a:t>      background:${c}; border-radius:50% 50% 50% 0;</a:t>
             </a:r>
             <a:endParaRPr lang="en-US" sz="1300" dirty="0"/>
           </a:p>
@@ -7013,7 +6991,7 @@
                 <a:ea typeface="Consolas" pitchFamily="34" charset="-122"/>
                 <a:cs typeface="Consolas" pitchFamily="34" charset="-120"/>
               </a:rPr>
-              <a:t xml:space="preserve">      transform:rotate(-45deg)"&gt;</a:t>
+              <a:t>      transform:rotate(-45deg)"&gt;</a:t>
             </a:r>
             <a:endParaRPr lang="en-US" sz="1300" dirty="0"/>
           </a:p>
@@ -7033,7 +7011,7 @@
                 <a:ea typeface="Consolas" pitchFamily="34" charset="-122"/>
                 <a:cs typeface="Consolas" pitchFamily="34" charset="-120"/>
               </a:rPr>
-              <a:t xml:space="preserve">      &lt;span&gt;${e}&lt;/span&gt;&lt;/div&gt;` });</a:t>
+              <a:t>      &lt;span&gt;${e}&lt;/span&gt;&lt;/div&gt;` });</a:t>
             </a:r>
             <a:endParaRPr lang="en-US" sz="1300" dirty="0"/>
           </a:p>
@@ -7585,7 +7563,7 @@
                 <a:ea typeface="맑은 고딕" pitchFamily="34" charset="-122"/>
                 <a:cs typeface="맑은 고딕" pitchFamily="34" charset="-120"/>
               </a:rPr>
-              <a:t xml:space="preserve">Geolocation API로 GPS 좌표를 받고, 하버사인(Haversine) 공식으로 두 지점 사이 </a:t>
+              <a:t>Geolocation API로 GPS 좌표를 받고, 하버사인(Haversine) 공식으로 두 지점 사이 </a:t>
             </a:r>
             <a:r>
               <a:rPr lang="en-US" sz="1500" dirty="0" err="1">
@@ -7607,7 +7585,7 @@
                 <a:ea typeface="맑은 고딕" pitchFamily="34" charset="-122"/>
                 <a:cs typeface="맑은 고딕" pitchFamily="34" charset="-120"/>
               </a:rPr>
-              <a:t xml:space="preserve"> </a:t>
+              <a:t> </a:t>
             </a:r>
             <a:r>
               <a:rPr lang="en-US" sz="1500" dirty="0" err="1">
@@ -7707,7 +7685,7 @@
                 <a:ea typeface="Consolas" pitchFamily="34" charset="-122"/>
                 <a:cs typeface="Consolas" pitchFamily="34" charset="-120"/>
               </a:rPr>
-              <a:t xml:space="preserve">function </a:t>
+              <a:t>function </a:t>
             </a:r>
             <a:r>
               <a:rPr lang="en-US" sz="1300" dirty="0">
@@ -7749,7 +7727,7 @@
                 <a:ea typeface="Consolas" pitchFamily="34" charset="-122"/>
                 <a:cs typeface="Consolas" pitchFamily="34" charset="-120"/>
               </a:rPr>
-              <a:t xml:space="preserve">  const R = 6371000; // 지구 반지름(m)</a:t>
+              <a:t>  const R = 6371000; // 지구 반지름(m)</a:t>
             </a:r>
             <a:endParaRPr lang="en-US" sz="1300" dirty="0"/>
           </a:p>
@@ -7769,7 +7747,7 @@
                 <a:ea typeface="Consolas" pitchFamily="34" charset="-122"/>
                 <a:cs typeface="Consolas" pitchFamily="34" charset="-120"/>
               </a:rPr>
-              <a:t xml:space="preserve">  const f1 = a*Math.PI/180, f2 = c*Math.PI/180;</a:t>
+              <a:t>  const f1 = a*Math.PI/180, f2 = c*Math.PI/180;</a:t>
             </a:r>
             <a:endParaRPr lang="en-US" sz="1300" dirty="0"/>
           </a:p>
@@ -7789,7 +7767,7 @@
                 <a:ea typeface="Consolas" pitchFamily="34" charset="-122"/>
                 <a:cs typeface="Consolas" pitchFamily="34" charset="-120"/>
               </a:rPr>
-              <a:t xml:space="preserve">  const df = (c-a)*Math.PI/180, dl = (d-b)*Math.PI/180;</a:t>
+              <a:t>  const df = (c-a)*Math.PI/180, dl = (d-b)*Math.PI/180;</a:t>
             </a:r>
             <a:endParaRPr lang="en-US" sz="1300" dirty="0"/>
           </a:p>
@@ -7809,7 +7787,7 @@
                 <a:ea typeface="Consolas" pitchFamily="34" charset="-122"/>
                 <a:cs typeface="Consolas" pitchFamily="34" charset="-120"/>
               </a:rPr>
-              <a:t xml:space="preserve">  const x = Math.sin(df/2)**2</a:t>
+              <a:t>  const x = Math.sin(df/2)**2</a:t>
             </a:r>
             <a:endParaRPr lang="en-US" sz="1300" dirty="0"/>
           </a:p>
@@ -7829,7 +7807,7 @@
                 <a:ea typeface="Consolas" pitchFamily="34" charset="-122"/>
                 <a:cs typeface="Consolas" pitchFamily="34" charset="-120"/>
               </a:rPr>
-              <a:t xml:space="preserve">          + Math.cos(f1)*Math.cos(f2)*Math.sin(dl/2)**2;</a:t>
+              <a:t>          + Math.cos(f1)*Math.cos(f2)*Math.sin(dl/2)**2;</a:t>
             </a:r>
             <a:endParaRPr lang="en-US" sz="1300" dirty="0"/>
           </a:p>
@@ -7849,7 +7827,7 @@
                 <a:ea typeface="Consolas" pitchFamily="34" charset="-122"/>
                 <a:cs typeface="Consolas" pitchFamily="34" charset="-120"/>
               </a:rPr>
-              <a:t xml:space="preserve">  return R * 2 * Math.atan2(Math.sqrt(x), Math.sqrt(1-x));</a:t>
+              <a:t>  return R * 2 * Math.atan2(Math.sqrt(x), Math.sqrt(1-x));</a:t>
             </a:r>
             <a:endParaRPr lang="en-US" sz="1300" dirty="0"/>
           </a:p>
@@ -7889,7 +7867,7 @@
                 <a:ea typeface="Consolas" pitchFamily="34" charset="-122"/>
                 <a:cs typeface="Consolas" pitchFamily="34" charset="-120"/>
               </a:rPr>
-              <a:t xml:space="preserve">function </a:t>
+              <a:t>function </a:t>
             </a:r>
             <a:r>
               <a:rPr lang="en-US" sz="1300" dirty="0">
@@ -7931,7 +7909,7 @@
                 <a:ea typeface="Consolas" pitchFamily="34" charset="-122"/>
                 <a:cs typeface="Consolas" pitchFamily="34" charset="-120"/>
               </a:rPr>
-              <a:t xml:space="preserve">                                : `${(m/1000).toFixed(1)}km`; }</a:t>
+              <a:t>                                : `${(m/1000).toFixed(1)}km`; }</a:t>
             </a:r>
             <a:endParaRPr lang="en-US" sz="1300" dirty="0"/>
           </a:p>
@@ -8015,7 +7993,7 @@
                 <a:ea typeface="맑은 고딕" pitchFamily="34" charset="-122"/>
                 <a:cs typeface="맑은 고딕" pitchFamily="34" charset="-120"/>
               </a:rPr>
-              <a:t xml:space="preserve">지도 </a:t>
+              <a:t>지도 </a:t>
             </a:r>
             <a:r>
               <a:rPr lang="en-US" sz="1300" dirty="0" err="1">
@@ -8037,7 +8015,7 @@
                 <a:ea typeface="맑은 고딕" pitchFamily="34" charset="-122"/>
                 <a:cs typeface="맑은 고딕" pitchFamily="34" charset="-120"/>
               </a:rPr>
-              <a:t xml:space="preserve"> ‘</a:t>
+              <a:t> ‘</a:t>
             </a:r>
             <a:r>
               <a:rPr lang="ko-KR" altLang="en-US" sz="1300" dirty="0">
@@ -8287,7 +8265,7 @@
                 <a:ea typeface="맑은 고딕" pitchFamily="34" charset="-122"/>
                 <a:cs typeface="맑은 고딕" pitchFamily="34" charset="-120"/>
               </a:rPr>
-              <a:t xml:space="preserve">필터 칩과 검색창은 같은 화장실 목록을 다른 조건으로 ‘다시 그리는’ </a:t>
+              <a:t>필터 칩과 검색창은 같은 화장실 목록을 다른 조건으로 ‘다시 그리는’ </a:t>
             </a:r>
             <a:r>
               <a:rPr lang="en-US" sz="1500" dirty="0" err="1">
@@ -8309,7 +8287,7 @@
                 <a:ea typeface="맑은 고딕" pitchFamily="34" charset="-122"/>
                 <a:cs typeface="맑은 고딕" pitchFamily="34" charset="-120"/>
               </a:rPr>
-              <a:t xml:space="preserve"> </a:t>
+              <a:t> </a:t>
             </a:r>
             <a:r>
               <a:rPr lang="en-US" sz="1500" dirty="0" err="1">
@@ -8409,7 +8387,7 @@
                 <a:ea typeface="Consolas" pitchFamily="34" charset="-122"/>
                 <a:cs typeface="Consolas" pitchFamily="34" charset="-120"/>
               </a:rPr>
-              <a:t xml:space="preserve">function </a:t>
+              <a:t>function </a:t>
             </a:r>
             <a:r>
               <a:rPr lang="en-US" sz="1350" dirty="0">
@@ -8451,7 +8429,7 @@
                 <a:ea typeface="Consolas" pitchFamily="34" charset="-122"/>
                 <a:cs typeface="Consolas" pitchFamily="34" charset="-120"/>
               </a:rPr>
-              <a:t xml:space="preserve">  switch (</a:t>
+              <a:t>  switch (</a:t>
             </a:r>
             <a:r>
               <a:rPr lang="en-US" sz="1350" dirty="0">
@@ -8493,7 +8471,7 @@
                 <a:ea typeface="Consolas" pitchFamily="34" charset="-122"/>
                 <a:cs typeface="Consolas" pitchFamily="34" charset="-120"/>
               </a:rPr>
-              <a:t xml:space="preserve">    </a:t>
+              <a:t>    </a:t>
             </a:r>
             <a:r>
               <a:rPr lang="en-US" sz="1350" dirty="0">
@@ -8524,7 +8502,7 @@
                 <a:ea typeface="Consolas" pitchFamily="34" charset="-122"/>
                 <a:cs typeface="Consolas" pitchFamily="34" charset="-120"/>
               </a:rPr>
-              <a:t xml:space="preserve">    case 'disabled': return t.disabled;</a:t>
+              <a:t>    case 'disabled': return t.disabled;</a:t>
             </a:r>
             <a:endParaRPr lang="en-US" sz="1350" dirty="0"/>
           </a:p>
@@ -8544,7 +8522,7 @@
                 <a:ea typeface="Consolas" pitchFamily="34" charset="-122"/>
                 <a:cs typeface="Consolas" pitchFamily="34" charset="-120"/>
               </a:rPr>
-              <a:t xml:space="preserve">    case 'public':   return t.type === 'public';</a:t>
+              <a:t>    case 'public':   return t.type === 'public';</a:t>
             </a:r>
             <a:endParaRPr lang="en-US" sz="1350" dirty="0"/>
           </a:p>
@@ -8564,7 +8542,7 @@
                 <a:ea typeface="Consolas" pitchFamily="34" charset="-122"/>
                 <a:cs typeface="Consolas" pitchFamily="34" charset="-120"/>
               </a:rPr>
-              <a:t xml:space="preserve">    case 'secret':   return t.type === 'secret';</a:t>
+              <a:t>    case 'secret':   return t.type === 'secret';</a:t>
             </a:r>
             <a:endParaRPr lang="en-US" sz="1350" dirty="0"/>
           </a:p>
@@ -8584,7 +8562,7 @@
                 <a:ea typeface="Consolas" pitchFamily="34" charset="-122"/>
                 <a:cs typeface="Consolas" pitchFamily="34" charset="-120"/>
               </a:rPr>
-              <a:t xml:space="preserve">    default: return true;  // '전체'</a:t>
+              <a:t>    default: return true;  // '전체'</a:t>
             </a:r>
             <a:endParaRPr lang="en-US" sz="1350" dirty="0"/>
           </a:p>
@@ -8604,7 +8582,7 @@
                 <a:ea typeface="Consolas" pitchFamily="34" charset="-122"/>
                 <a:cs typeface="Consolas" pitchFamily="34" charset="-120"/>
               </a:rPr>
-              <a:t xml:space="preserve">  }</a:t>
+              <a:t>  }</a:t>
             </a:r>
             <a:endParaRPr lang="en-US" sz="1350" dirty="0"/>
           </a:p>
@@ -8934,7 +8912,7 @@
         <p:spPr>
           <a:xfrm>
             <a:off x="548640" y="1417320"/>
-            <a:ext cx="8869680" cy="457200"/>
+            <a:ext cx="9494770" cy="457200"/>
           </a:xfrm>
           <a:prstGeom prst="rect">
             <a:avLst/>
@@ -8958,7 +8936,7 @@
                 <a:ea typeface="맑은 고딕" pitchFamily="34" charset="-122"/>
                 <a:cs typeface="맑은 고딕" pitchFamily="34" charset="-120"/>
               </a:rPr>
-              <a:t xml:space="preserve">코인 1개로 </a:t>
+              <a:t>코인 1개로 </a:t>
             </a:r>
             <a:r>
               <a:rPr lang="en-US" sz="1500" dirty="0" err="1">
@@ -8980,7 +8958,7 @@
                 <a:ea typeface="맑은 고딕" pitchFamily="34" charset="-122"/>
                 <a:cs typeface="맑은 고딕" pitchFamily="34" charset="-120"/>
               </a:rPr>
-              <a:t xml:space="preserve"> </a:t>
+              <a:t> </a:t>
             </a:r>
             <a:r>
               <a:rPr lang="ko-KR" altLang="en-US" sz="1500" dirty="0">
@@ -9005,6 +8983,28 @@
               <a:t>하며</a:t>
             </a:r>
             <a:r>
+              <a:rPr lang="ko-KR" altLang="en-US" sz="1500" dirty="0">
+                <a:solidFill>
+                  <a:srgbClr val="5C7088"/>
+                </a:solidFill>
+                <a:latin typeface="맑은 고딕" pitchFamily="34" charset="0"/>
+                <a:ea typeface="맑은 고딕" pitchFamily="34" charset="-122"/>
+                <a:cs typeface="맑은 고딕" pitchFamily="34" charset="-120"/>
+              </a:rPr>
+              <a:t> </a:t>
+            </a:r>
+            <a:r>
+              <a:rPr lang="en-US" sz="1500" dirty="0" err="1">
+                <a:solidFill>
+                  <a:srgbClr val="5C7088"/>
+                </a:solidFill>
+                <a:latin typeface="맑은 고딕" pitchFamily="34" charset="0"/>
+                <a:ea typeface="맑은 고딕" pitchFamily="34" charset="-122"/>
+                <a:cs typeface="맑은 고딕" pitchFamily="34" charset="-120"/>
+              </a:rPr>
+              <a:t>제보</a:t>
+            </a:r>
+            <a:r>
               <a:rPr lang="en-US" sz="1500" dirty="0">
                 <a:solidFill>
                   <a:srgbClr val="5C7088"/>
@@ -9013,7 +9013,7 @@
                 <a:ea typeface="맑은 고딕" pitchFamily="34" charset="-122"/>
                 <a:cs typeface="맑은 고딕" pitchFamily="34" charset="-120"/>
               </a:rPr>
-              <a:t xml:space="preserve">·제보 기능 포함. unlockedIds 목록으로 중복 </a:t>
+              <a:t> </a:t>
             </a:r>
             <a:r>
               <a:rPr lang="en-US" sz="1500" dirty="0" err="1">
@@ -9024,6 +9024,72 @@
                 <a:ea typeface="맑은 고딕" pitchFamily="34" charset="-122"/>
                 <a:cs typeface="맑은 고딕" pitchFamily="34" charset="-120"/>
               </a:rPr>
+              <a:t>기능</a:t>
+            </a:r>
+            <a:r>
+              <a:rPr lang="ko-KR" altLang="en-US" sz="1500" dirty="0">
+                <a:solidFill>
+                  <a:srgbClr val="5C7088"/>
+                </a:solidFill>
+                <a:latin typeface="맑은 고딕" pitchFamily="34" charset="0"/>
+                <a:ea typeface="맑은 고딕" pitchFamily="34" charset="-122"/>
+                <a:cs typeface="맑은 고딕" pitchFamily="34" charset="-120"/>
+              </a:rPr>
+              <a:t>을</a:t>
+            </a:r>
+            <a:r>
+              <a:rPr lang="en-US" sz="1500" dirty="0">
+                <a:solidFill>
+                  <a:srgbClr val="5C7088"/>
+                </a:solidFill>
+                <a:latin typeface="맑은 고딕" pitchFamily="34" charset="0"/>
+                <a:ea typeface="맑은 고딕" pitchFamily="34" charset="-122"/>
+                <a:cs typeface="맑은 고딕" pitchFamily="34" charset="-120"/>
+              </a:rPr>
+              <a:t> </a:t>
+            </a:r>
+            <a:r>
+              <a:rPr lang="en-US" sz="1500" dirty="0" err="1">
+                <a:solidFill>
+                  <a:srgbClr val="5C7088"/>
+                </a:solidFill>
+                <a:latin typeface="맑은 고딕" pitchFamily="34" charset="0"/>
+                <a:ea typeface="맑은 고딕" pitchFamily="34" charset="-122"/>
+                <a:cs typeface="맑은 고딕" pitchFamily="34" charset="-120"/>
+              </a:rPr>
+              <a:t>포함</a:t>
+            </a:r>
+            <a:r>
+              <a:rPr lang="ko-KR" altLang="en-US" sz="1500" dirty="0">
+                <a:solidFill>
+                  <a:srgbClr val="5C7088"/>
+                </a:solidFill>
+                <a:latin typeface="맑은 고딕" pitchFamily="34" charset="0"/>
+                <a:ea typeface="맑은 고딕" pitchFamily="34" charset="-122"/>
+                <a:cs typeface="맑은 고딕" pitchFamily="34" charset="-120"/>
+              </a:rPr>
+              <a:t>합니다</a:t>
+            </a:r>
+            <a:r>
+              <a:rPr lang="en-US" sz="1500" dirty="0">
+                <a:solidFill>
+                  <a:srgbClr val="5C7088"/>
+                </a:solidFill>
+                <a:latin typeface="맑은 고딕" pitchFamily="34" charset="0"/>
+                <a:ea typeface="맑은 고딕" pitchFamily="34" charset="-122"/>
+                <a:cs typeface="맑은 고딕" pitchFamily="34" charset="-120"/>
+              </a:rPr>
+              <a:t>. unlockedIds 목록으로 중복 </a:t>
+            </a:r>
+            <a:r>
+              <a:rPr lang="en-US" sz="1500" dirty="0" err="1">
+                <a:solidFill>
+                  <a:srgbClr val="5C7088"/>
+                </a:solidFill>
+                <a:latin typeface="맑은 고딕" pitchFamily="34" charset="0"/>
+                <a:ea typeface="맑은 고딕" pitchFamily="34" charset="-122"/>
+                <a:cs typeface="맑은 고딕" pitchFamily="34" charset="-120"/>
+              </a:rPr>
               <a:t>차감을</a:t>
             </a:r>
             <a:r>
@@ -9035,7 +9101,7 @@
                 <a:ea typeface="맑은 고딕" pitchFamily="34" charset="-122"/>
                 <a:cs typeface="맑은 고딕" pitchFamily="34" charset="-120"/>
               </a:rPr>
-              <a:t xml:space="preserve"> </a:t>
+              <a:t> </a:t>
             </a:r>
             <a:r>
               <a:rPr lang="en-US" sz="1500" dirty="0" err="1">
@@ -9135,7 +9201,7 @@
                 <a:ea typeface="Consolas" pitchFamily="34" charset="-122"/>
                 <a:cs typeface="Consolas" pitchFamily="34" charset="-120"/>
               </a:rPr>
-              <a:t xml:space="preserve">function </a:t>
+              <a:t>function </a:t>
             </a:r>
             <a:r>
               <a:rPr lang="en-US" sz="1300" dirty="0">
@@ -9177,7 +9243,7 @@
                 <a:ea typeface="Consolas" pitchFamily="34" charset="-122"/>
                 <a:cs typeface="Consolas" pitchFamily="34" charset="-120"/>
               </a:rPr>
-              <a:t xml:space="preserve">  if(coins&lt;=0){ showToast('코인이 부족합니다'); return; }</a:t>
+              <a:t>  if(coins&lt;=0){ showToast('코인이 부족합니다'); return; }</a:t>
             </a:r>
             <a:endParaRPr lang="en-US" sz="1300" dirty="0"/>
           </a:p>
@@ -9197,7 +9263,7 @@
                 <a:ea typeface="Consolas" pitchFamily="34" charset="-122"/>
                 <a:cs typeface="Consolas" pitchFamily="34" charset="-120"/>
               </a:rPr>
-              <a:t xml:space="preserve">  coins--; localStorage.setItem('coins', coins);</a:t>
+              <a:t>  coins--; localStorage.setItem('coins', coins);</a:t>
             </a:r>
             <a:endParaRPr lang="en-US" sz="1300" dirty="0"/>
           </a:p>
@@ -9226,7 +9292,29 @@
                 <a:ea typeface="Consolas" pitchFamily="34" charset="-122"/>
                 <a:cs typeface="Consolas" pitchFamily="34" charset="-120"/>
               </a:rPr>
-              <a:t xml:space="preserve">  // 해금 목록에 저장 → 이후엔 다시 차감하지 않음</a:t>
+              <a:t>  // </a:t>
+            </a:r>
+            <a:r>
+              <a:rPr lang="ko-KR" altLang="en-US" sz="1300" dirty="0">
+                <a:solidFill>
+                  <a:srgbClr val="CFE3FF"/>
+                </a:solidFill>
+                <a:latin typeface="Consolas" pitchFamily="34" charset="0"/>
+                <a:ea typeface="Consolas" pitchFamily="34" charset="-122"/>
+                <a:cs typeface="Consolas" pitchFamily="34" charset="-120"/>
+              </a:rPr>
+              <a:t>잠금 해제</a:t>
+            </a:r>
+            <a:r>
+              <a:rPr lang="en-US" sz="1300" dirty="0">
+                <a:solidFill>
+                  <a:srgbClr val="CFE3FF"/>
+                </a:solidFill>
+                <a:latin typeface="Consolas" pitchFamily="34" charset="0"/>
+                <a:ea typeface="Consolas" pitchFamily="34" charset="-122"/>
+                <a:cs typeface="Consolas" pitchFamily="34" charset="-120"/>
+              </a:rPr>
+              <a:t> 목록에 저장 → 이후엔 다시 차감하지 않음</a:t>
             </a:r>
             <a:endParaRPr lang="en-US" sz="1300" dirty="0"/>
           </a:p>
@@ -9246,7 +9334,7 @@
                 <a:ea typeface="Consolas" pitchFamily="34" charset="-122"/>
                 <a:cs typeface="Consolas" pitchFamily="34" charset="-120"/>
               </a:rPr>
-              <a:t xml:space="preserve">  if(!unlockedIds.includes(sel.id)){</a:t>
+              <a:t>  if(!unlockedIds.includes(sel.id)){</a:t>
             </a:r>
             <a:endParaRPr lang="en-US" sz="1300" dirty="0"/>
           </a:p>
@@ -9266,7 +9354,7 @@
                 <a:ea typeface="Consolas" pitchFamily="34" charset="-122"/>
                 <a:cs typeface="Consolas" pitchFamily="34" charset="-120"/>
               </a:rPr>
-              <a:t xml:space="preserve">    </a:t>
+              <a:t>    </a:t>
             </a:r>
             <a:r>
               <a:rPr lang="en-US" sz="1300" dirty="0">
@@ -9308,7 +9396,7 @@
                 <a:ea typeface="Consolas" pitchFamily="34" charset="-122"/>
                 <a:cs typeface="Consolas" pitchFamily="34" charset="-120"/>
               </a:rPr>
-              <a:t xml:space="preserve">    localStorage.setItem('unlockedIds',</a:t>
+              <a:t>    localStorage.setItem('unlockedIds',</a:t>
             </a:r>
             <a:endParaRPr lang="en-US" sz="1300" dirty="0"/>
           </a:p>
@@ -9328,7 +9416,7 @@
                 <a:ea typeface="Consolas" pitchFamily="34" charset="-122"/>
                 <a:cs typeface="Consolas" pitchFamily="34" charset="-120"/>
               </a:rPr>
-              <a:t xml:space="preserve">      JSON.stringify(unlockedIds));</a:t>
+              <a:t>      JSON.stringify(unlockedIds));</a:t>
             </a:r>
             <a:endParaRPr lang="en-US" sz="1300" dirty="0"/>
           </a:p>
@@ -9348,7 +9436,7 @@
                 <a:ea typeface="Consolas" pitchFamily="34" charset="-122"/>
                 <a:cs typeface="Consolas" pitchFamily="34" charset="-120"/>
               </a:rPr>
-              <a:t xml:space="preserve">  }</a:t>
+              <a:t>  }</a:t>
             </a:r>
             <a:endParaRPr lang="en-US" sz="1300" dirty="0"/>
           </a:p>
@@ -9368,7 +9456,7 @@
                 <a:ea typeface="Consolas" pitchFamily="34" charset="-122"/>
                 <a:cs typeface="Consolas" pitchFamily="34" charset="-120"/>
               </a:rPr>
-              <a:t xml:space="preserve">  // 비밀번호 · 위치 정보 화면에 표시</a:t>
+              <a:t>  // 비밀번호 · 위치 정보 화면에 표시</a:t>
             </a:r>
             <a:endParaRPr lang="en-US" sz="1300" dirty="0"/>
           </a:p>
@@ -9783,7 +9871,7 @@
                 <a:ea typeface="맑은 고딕" pitchFamily="34" charset="-122"/>
                 <a:cs typeface="맑은 고딕" pitchFamily="34" charset="-120"/>
               </a:rPr>
-              <a:t xml:space="preserve">작성한 리뷰는 reviewsDB 객체에 누적되고, 기존 평점과 합산되어 </a:t>
+              <a:t>작성한 리뷰는 reviewsDB 객체에 누적되고, 기존 평점과 합산되어 </a:t>
             </a:r>
             <a:r>
               <a:rPr lang="en-US" sz="1500" dirty="0" err="1">
@@ -9805,7 +9893,7 @@
                 <a:ea typeface="맑은 고딕" pitchFamily="34" charset="-122"/>
                 <a:cs typeface="맑은 고딕" pitchFamily="34" charset="-120"/>
               </a:rPr>
-              <a:t xml:space="preserve"> </a:t>
+              <a:t> </a:t>
             </a:r>
             <a:r>
               <a:rPr lang="en-US" sz="1500" dirty="0" err="1">
@@ -9905,7 +9993,7 @@
                 <a:ea typeface="Consolas" pitchFamily="34" charset="-122"/>
                 <a:cs typeface="Consolas" pitchFamily="34" charset="-120"/>
               </a:rPr>
-              <a:t xml:space="preserve">function </a:t>
+              <a:t>function </a:t>
             </a:r>
             <a:r>
               <a:rPr lang="en-US" sz="1300" dirty="0">
@@ -9947,7 +10035,7 @@
                 <a:ea typeface="Consolas" pitchFamily="34" charset="-122"/>
                 <a:cs typeface="Consolas" pitchFamily="34" charset="-120"/>
               </a:rPr>
-              <a:t xml:space="preserve">  const uRevs = </a:t>
+              <a:t>  const uRevs = </a:t>
             </a:r>
             <a:r>
               <a:rPr lang="en-US" sz="1300" dirty="0">
@@ -9989,7 +10077,7 @@
                 <a:ea typeface="Consolas" pitchFamily="34" charset="-122"/>
                 <a:cs typeface="Consolas" pitchFamily="34" charset="-120"/>
               </a:rPr>
-              <a:t xml:space="preserve">  if(!uRevs.length) return { avg:t.rating, cnt:0 }; // 리뷰 없으면 별점 숨김</a:t>
+              <a:t>  if(!uRevs.length) return { avg:t.rating, cnt:0 }; // 리뷰 없으면 별점 숨김</a:t>
             </a:r>
             <a:endParaRPr lang="en-US" sz="1300" dirty="0"/>
           </a:p>
@@ -10018,7 +10106,7 @@
                 <a:ea typeface="Consolas" pitchFamily="34" charset="-122"/>
                 <a:cs typeface="Consolas" pitchFamily="34" charset="-120"/>
               </a:rPr>
-              <a:t xml:space="preserve">  const uAvg = uRevs.reduce((a,b)=&gt;a+b.stars,0)/uRevs.length;</a:t>
+              <a:t>  const uAvg = uRevs.reduce((a,b)=&gt;a+b.stars,0)/uRevs.length;</a:t>
             </a:r>
             <a:endParaRPr lang="en-US" sz="1300" dirty="0"/>
           </a:p>
@@ -10038,7 +10126,7 @@
                 <a:ea typeface="Consolas" pitchFamily="34" charset="-122"/>
                 <a:cs typeface="Consolas" pitchFamily="34" charset="-120"/>
               </a:rPr>
-              <a:t xml:space="preserve">  return { avg: Math.round(uAvg*10)/10, cnt: uRevs.length };</a:t>
+              <a:t>  return { avg: Math.round(uAvg*10)/10, cnt: uRevs.length };</a:t>
             </a:r>
             <a:endParaRPr lang="en-US" sz="1300" dirty="0"/>
           </a:p>
@@ -10069,17 +10157,6 @@
               </a:lnSpc>
               <a:buNone/>
             </a:pPr>
-            <a:r>
-              <a:rPr lang="en-US" sz="1300" dirty="0">
-                <a:solidFill>
-                  <a:srgbClr val="CFE3FF"/>
-                </a:solidFill>
-                <a:latin typeface="Consolas" pitchFamily="34" charset="0"/>
-                <a:ea typeface="Consolas" pitchFamily="34" charset="-122"/>
-                <a:cs typeface="Consolas" pitchFamily="34" charset="-120"/>
-              </a:rPr>
-              <a:t/>
-            </a:r>
             <a:endParaRPr lang="en-US" sz="1300" dirty="0"/>
           </a:p>
           <a:p>
@@ -10089,17 +10166,6 @@
               </a:lnSpc>
               <a:buNone/>
             </a:pPr>
-            <a:r>
-              <a:rPr lang="en-US" sz="1300" dirty="0">
-                <a:solidFill>
-                  <a:srgbClr val="CFE3FF"/>
-                </a:solidFill>
-                <a:latin typeface="Consolas" pitchFamily="34" charset="0"/>
-                <a:ea typeface="Consolas" pitchFamily="34" charset="-122"/>
-                <a:cs typeface="Consolas" pitchFamily="34" charset="-120"/>
-              </a:rPr>
-              <a:t/>
-            </a:r>
             <a:endParaRPr lang="en-US" sz="1300" dirty="0"/>
           </a:p>
           <a:p>
@@ -10241,7 +10307,7 @@
                 <a:ea typeface="맑은 고딕" pitchFamily="34" charset="-122"/>
                 <a:cs typeface="맑은 고딕" pitchFamily="34" charset="-120"/>
               </a:rPr>
-              <a:t xml:space="preserve">리뷰 작성 시 코인 +1 </a:t>
+              <a:t>리뷰 작성 시 코인 +1 </a:t>
             </a:r>
             <a:r>
               <a:rPr lang="en-US" sz="1300" dirty="0" err="1">
@@ -10263,7 +10329,7 @@
                 <a:ea typeface="맑은 고딕" pitchFamily="34" charset="-122"/>
                 <a:cs typeface="맑은 고딕" pitchFamily="34" charset="-120"/>
               </a:rPr>
-              <a:t xml:space="preserve"> </a:t>
+              <a:t> </a:t>
             </a:r>
           </a:p>
           <a:p>
@@ -10279,7 +10345,7 @@
                 <a:ea typeface="맑은 고딕" pitchFamily="34" charset="-122"/>
                 <a:cs typeface="맑은 고딕" pitchFamily="34" charset="-120"/>
               </a:rPr>
-              <a:t xml:space="preserve">	→ 모인 코인으로 비밀 </a:t>
+              <a:t>	→ 모인 코인으로 비밀 </a:t>
             </a:r>
             <a:r>
               <a:rPr lang="en-US" sz="1300" dirty="0" err="1">
@@ -10301,7 +10367,7 @@
                 <a:ea typeface="맑은 고딕" pitchFamily="34" charset="-122"/>
                 <a:cs typeface="맑은 고딕" pitchFamily="34" charset="-120"/>
               </a:rPr>
-              <a:t xml:space="preserve"> </a:t>
+              <a:t> </a:t>
             </a:r>
             <a:r>
               <a:rPr lang="en-US" sz="1300" dirty="0" err="1">
